--- a/templates/modern-yellow.pptx
+++ b/templates/modern-yellow.pptx
@@ -515,7 +515,7 @@
       </p:grpSpPr>
       <p:sp>
         <p:nvSpPr>
-          <p:cNvPr id="5" name="Title 4">
+          <p:cNvPr id="5" name="title">
             <a:extLst>
               <a:ext uri="{FF2B5EF4-FFF2-40B4-BE49-F238E27FC236}">
                 <a16:creationId xmlns:a16="http://schemas.microsoft.com/office/drawing/2014/main" id="{3E43D922-3CE3-A396-4961-66BAF4EC3FCA}"/>
@@ -552,7 +552,7 @@
       </p:sp>
       <p:sp>
         <p:nvSpPr>
-          <p:cNvPr id="6" name="Subtitle 5">
+          <p:cNvPr id="6" name="subtitle">
             <a:extLst>
               <a:ext uri="{FF2B5EF4-FFF2-40B4-BE49-F238E27FC236}">
                 <a16:creationId xmlns:a16="http://schemas.microsoft.com/office/drawing/2014/main" id="{8B12C0E3-4D97-4F2A-9C1B-1E29A4B5D6F0}"/>
@@ -803,7 +803,7 @@
       </p:sp>
       <p:sp>
         <p:nvSpPr>
-          <p:cNvPr id="5" name="Title 4">
+          <p:cNvPr id="5" name="title">
             <a:extLst>
               <a:ext uri="{FF2B5EF4-FFF2-40B4-BE49-F238E27FC236}">
                 <a16:creationId xmlns:a16="http://schemas.microsoft.com/office/drawing/2014/main" id="{7829E47A-B364-8ADD-ED74-39A4D7535952}"/>
@@ -1192,7 +1192,7 @@
       </p:sp>
       <p:sp>
         <p:nvSpPr>
-          <p:cNvPr id="6" name="Text Placeholder 5">
+          <p:cNvPr id="6" name="body">
             <a:extLst>
               <a:ext uri="{FF2B5EF4-FFF2-40B4-BE49-F238E27FC236}">
                 <a16:creationId xmlns:a16="http://schemas.microsoft.com/office/drawing/2014/main" id="{4406FD62-B08A-2121-5E04-7063FD47E505}"/>

--- a/templates/modern-yellow.pptx
+++ b/templates/modern-yellow.pptx
@@ -994,7 +994,7 @@
 
 <file path=ppt/slideLayouts/slideLayout4.xml><?xml version="1.0" encoding="utf-8"?>
 <p:sldLayout xmlns:a="http://schemas.openxmlformats.org/drawingml/2006/main" xmlns:r="http://schemas.openxmlformats.org/officeDocument/2006/relationships" xmlns:p="http://schemas.openxmlformats.org/presentationml/2006/main" preserve="1" userDrawn="1">
-  <p:cSld name="69_Custom Layout">
+  <p:cSld name="Statement">
     <p:spTree>
       <p:nvGrpSpPr>
         <p:cNvPr id="1" name=""/>
